--- a/powerpoint/Presentasjon_Prosjektkontroll_Capex_EVM_2026.pptx
+++ b/powerpoint/Presentasjon_Prosjektkontroll_Capex_EVM_2026.pptx
@@ -3214,7 +3214,7 @@
               </a:defRPr>
             </a:pPr>
             <a:r>
-              <a:t>Dato: 14.10.2026  •  Frank Ellingsen, Project Controller &amp; BI-Spesialist</a:t>
+              <a:t>Dato: 17.10.2026  •  Frank Ellingsen, Project Controller &amp; BI-Spesialist</a:t>
             </a:r>
           </a:p>
           <a:p>
@@ -3229,7 +3229,7 @@
               </a:defRPr>
             </a:pPr>
             <a:r>
-              <a:t>Audit Stempel: b4f2824c724c4ef11e0ecd83...  |  Portefølje-EVM Avstemt per 31.08.2026</a:t>
+              <a:t>Audit Stempel: e7d1fe487362395a04ced420...  |  Portefølje-EVM Avstemt per 31.08.2026</a:t>
             </a:r>
           </a:p>
         </p:txBody>
@@ -3746,7 +3746,7 @@
               </a:defRPr>
             </a:pPr>
             <a:r>
-              <a:t>Kristiansand kommune | Økonomi &amp; Virksomhetsstyring  •  Audit ID: b4f2824c724c  •  Side 2 av 7</a:t>
+              <a:t>Kristiansand kommune | Økonomi &amp; Virksomhetsstyring  •  Audit ID: e7d1fe487362  •  Side 2 av 7</a:t>
             </a:r>
           </a:p>
         </p:txBody>
@@ -4518,7 +4518,7 @@
               </a:defRPr>
             </a:pPr>
             <a:r>
-              <a:t>Kristiansand kommune | Økonomi &amp; Virksomhetsstyring  •  Audit ID: b4f2824c724c  •  Side 3 av 7</a:t>
+              <a:t>Kristiansand kommune | Økonomi &amp; Virksomhetsstyring  •  Audit ID: e7d1fe487362  •  Side 3 av 7</a:t>
             </a:r>
           </a:p>
         </p:txBody>
@@ -5064,7 +5064,7 @@
               </a:defRPr>
             </a:pPr>
             <a:r>
-              <a:t>Kristiansand kommune | Økonomi &amp; Virksomhetsstyring  •  Audit ID: b4f2824c724c  •  Side 4 av 7</a:t>
+              <a:t>Kristiansand kommune | Økonomi &amp; Virksomhetsstyring  •  Audit ID: e7d1fe487362  •  Side 4 av 7</a:t>
             </a:r>
           </a:p>
         </p:txBody>
@@ -5581,7 +5581,7 @@
               </a:defRPr>
             </a:pPr>
             <a:r>
-              <a:t>Kristiansand kommune | Økonomi &amp; Virksomhetsstyring  •  Audit ID: b4f2824c724c  •  Side 5 av 7</a:t>
+              <a:t>Kristiansand kommune | Økonomi &amp; Virksomhetsstyring  •  Audit ID: e7d1fe487362  •  Side 5 av 7</a:t>
             </a:r>
           </a:p>
         </p:txBody>
@@ -5972,7 +5972,7 @@
               </a:defRPr>
             </a:pPr>
             <a:r>
-              <a:t>Kristiansand kommune | Økonomi &amp; Virksomhetsstyring  •  Audit ID: b4f2824c724c  •  Side 6 av 7</a:t>
+              <a:t>Kristiansand kommune | Økonomi &amp; Virksomhetsstyring  •  Audit ID: e7d1fe487362  •  Side 6 av 7</a:t>
             </a:r>
           </a:p>
         </p:txBody>
@@ -6171,7 +6171,7 @@
               </a:defRPr>
             </a:pPr>
             <a:r>
-              <a:t>Kristiansand, 14.10.2026  •  Frank Ellingsen, Project Controller &amp; BI-Spesialist (Attestert Stage-Gate Port 9)</a:t>
+              <a:t>Kristiansand, 17.10.2026  •  Frank Ellingsen, Project Controller &amp; BI-Spesialist (Attestert Stage-Gate Port 9)</a:t>
             </a:r>
           </a:p>
         </p:txBody>
@@ -6207,7 +6207,7 @@
               </a:defRPr>
             </a:pPr>
             <a:r>
-              <a:t>Kristiansand kommune | Økonomi &amp; Virksomhetsstyring  •  Audit ID: b4f2824c724c  •  Side 7 av 7</a:t>
+              <a:t>Kristiansand kommune | Økonomi &amp; Virksomhetsstyring  •  Audit ID: e7d1fe487362  •  Side 7 av 7</a:t>
             </a:r>
           </a:p>
         </p:txBody>
